--- a/Foundation_F5/Workshop/F5-W06_Apply_Workshop_L11-L12_Our_Food_and_Health_Podcast.pptx
+++ b/Foundation_F5/Workshop/F5-W06_Apply_Workshop_L11-L12_Our_Food_and_Health_Podcast.pptx
@@ -7436,7 +7436,7 @@
                 <a:latin typeface="Calibri" pitchFamily="34" charset="0"/>
                 <a:cs typeface="Amiri" pitchFamily="2" charset="-78"/>
               </a:rPr>
-              <a:t>Odd numbers come from F5-L11, even numbers from F5-L12. Core: a full sentence from the starter. Develop: add the “more” part. Stretch: link two answers with </a:t>
+              <a:t>Odd numbers come from F5-L11, even numbers from F5-L12. Core: a full sentence from the starter. Develop: add the “more” part. Stretch: link two answers with ‏</a:t>
             </a:r>
             <a:pPr algn="l" indent="0" marL="0">
               <a:buNone/>
@@ -7463,7 +7463,7 @@
                 <a:latin typeface="Calibri" pitchFamily="34" charset="0"/>
                 <a:cs typeface="Amiri" pitchFamily="2" charset="-78"/>
               </a:rPr>
-              <a:t>, </a:t>
+              <a:t>‏, ‏</a:t>
             </a:r>
             <a:pPr algn="l" indent="0" marL="0">
               <a:buNone/>
@@ -7490,7 +7490,7 @@
                 <a:latin typeface="Calibri" pitchFamily="34" charset="0"/>
                 <a:cs typeface="Amiri" pitchFamily="2" charset="-78"/>
               </a:rPr>
-              <a:t> or </a:t>
+              <a:t>‏ or ‏</a:t>
             </a:r>
             <a:pPr algn="l" indent="0" marL="0">
               <a:buNone/>
@@ -7517,7 +7517,7 @@
                 <a:latin typeface="Calibri" pitchFamily="34" charset="0"/>
                 <a:cs typeface="Amiri" pitchFamily="2" charset="-78"/>
               </a:rPr>
-              <a:t>. Swap after each question.</a:t>
+              <a:t>‏. Swap after each question.</a:t>
             </a:r>
             <a:endParaRPr lang="en-US" sz="1100" dirty="0"/>
           </a:p>
@@ -10123,7 +10123,7 @@
                 <a:latin typeface="Calibri" pitchFamily="34" charset="0"/>
                 <a:cs typeface="Amiri" pitchFamily="2" charset="-78"/>
               </a:rPr>
-              <a:t>Record your podcast slot (30–45 seconds) in three parts: (1) your meals and favourite food with a reason, (2) a time you were ill and what you did, (3) one piece of advice for a healthy life. Use </a:t>
+              <a:t>Record your podcast slot (30–45 seconds) in three parts: (1) your meals and favourite food with a reason, (2) a time you were ill and what you did, (3) one piece of advice for a healthy life. Use ‏</a:t>
             </a:r>
             <a:pPr algn="l" indent="0" marL="0">
               <a:buNone/>
@@ -10150,7 +10150,7 @@
                 <a:latin typeface="Calibri" pitchFamily="34" charset="0"/>
                 <a:cs typeface="Amiri" pitchFamily="2" charset="-78"/>
               </a:rPr>
-              <a:t> and </a:t>
+              <a:t>‏ and ‏</a:t>
             </a:r>
             <a:pPr algn="l" indent="0" marL="0">
               <a:buNone/>
@@ -10177,7 +10177,7 @@
                 <a:latin typeface="Calibri" pitchFamily="34" charset="0"/>
                 <a:cs typeface="Amiri" pitchFamily="2" charset="-78"/>
               </a:rPr>
-              <a:t>.</a:t>
+              <a:t>‏.</a:t>
             </a:r>
             <a:endParaRPr lang="en-US" sz="1350" dirty="0"/>
           </a:p>
@@ -10894,7 +10894,7 @@
                 <a:latin typeface="Calibri" pitchFamily="34" charset="0"/>
                 <a:cs typeface="Amiri" pitchFamily="2" charset="-78"/>
               </a:rPr>
-              <a:t>Use four connectors: </a:t>
+              <a:t>Use four connectors: ‏</a:t>
             </a:r>
             <a:pPr algn="l" indent="0" marL="0">
               <a:buNone/>
@@ -11002,7 +11002,7 @@
                 <a:latin typeface="Calibri" pitchFamily="34" charset="0"/>
                 <a:cs typeface="Amiri" pitchFamily="2" charset="-78"/>
               </a:rPr>
-              <a:t>.</a:t>
+              <a:t>‏.</a:t>
             </a:r>
             <a:endParaRPr lang="en-US" sz="1150" dirty="0"/>
           </a:p>
@@ -11139,7 +11139,7 @@
                 <a:latin typeface="Calibri" pitchFamily="34" charset="0"/>
                 <a:cs typeface="Amiri" pitchFamily="2" charset="-78"/>
               </a:rPr>
-              <a:t>Add an example (</a:t>
+              <a:t>Add an example (‏</a:t>
             </a:r>
             <a:pPr algn="l" indent="0" marL="0">
               <a:buNone/>
@@ -11166,7 +11166,7 @@
                 <a:latin typeface="Calibri" pitchFamily="34" charset="0"/>
                 <a:cs typeface="Amiri" pitchFamily="2" charset="-78"/>
               </a:rPr>
-              <a:t> …), a preference (</a:t>
+              <a:t> …‏), a preference (‏</a:t>
             </a:r>
             <a:pPr algn="l" indent="0" marL="0">
               <a:buNone/>
@@ -11193,7 +11193,7 @@
                 <a:latin typeface="Calibri" pitchFamily="34" charset="0"/>
                 <a:cs typeface="Amiri" pitchFamily="2" charset="-78"/>
               </a:rPr>
-              <a:t> …) and </a:t>
+              <a:t> …‏) and ‏</a:t>
             </a:r>
             <a:pPr algn="l" indent="0" marL="0">
               <a:buNone/>
@@ -11220,7 +11220,7 @@
                 <a:latin typeface="Calibri" pitchFamily="34" charset="0"/>
                 <a:cs typeface="Amiri" pitchFamily="2" charset="-78"/>
               </a:rPr>
-              <a:t>.</a:t>
+              <a:t>‏.</a:t>
             </a:r>
             <a:endParaRPr lang="en-US" sz="1150" dirty="0"/>
           </a:p>
@@ -17637,7 +17637,7 @@
                 <a:latin typeface="Calibri" pitchFamily="34" charset="0"/>
                 <a:cs typeface="Amiri" pitchFamily="2" charset="-78"/>
               </a:rPr>
-              <a:t>Masculine food → </a:t>
+              <a:t>Masculine food → ‏</a:t>
             </a:r>
             <a:pPr algn="l" indent="0" marL="0">
               <a:buNone/>
@@ -17664,7 +17664,7 @@
                 <a:latin typeface="Calibri" pitchFamily="34" charset="0"/>
                 <a:cs typeface="Amiri" pitchFamily="2" charset="-78"/>
               </a:rPr>
-              <a:t>.</a:t>
+              <a:t>‏.</a:t>
             </a:r>
             <a:endParaRPr lang="en-US" sz="1150" dirty="0"/>
           </a:p>
@@ -17875,7 +17875,7 @@
                 <a:latin typeface="Calibri" pitchFamily="34" charset="0"/>
                 <a:cs typeface="Amiri" pitchFamily="2" charset="-78"/>
               </a:rPr>
-              <a:t>Feminine body part → </a:t>
+              <a:t>Feminine body part → ‏</a:t>
             </a:r>
             <a:pPr algn="l" indent="0" marL="0">
               <a:buNone/>
@@ -17902,7 +17902,7 @@
                 <a:latin typeface="Calibri" pitchFamily="34" charset="0"/>
                 <a:cs typeface="Amiri" pitchFamily="2" charset="-78"/>
               </a:rPr>
-              <a:t>.</a:t>
+              <a:t>‏.</a:t>
             </a:r>
             <a:endParaRPr lang="en-US" sz="1150" dirty="0"/>
           </a:p>
@@ -18113,7 +18113,7 @@
                 <a:latin typeface="Calibri" pitchFamily="34" charset="0"/>
                 <a:cs typeface="Amiri" pitchFamily="2" charset="-78"/>
               </a:rPr>
-              <a:t>Duration = </a:t>
+              <a:t>Duration = ‏</a:t>
             </a:r>
             <a:pPr algn="l" indent="0" marL="0">
               <a:buNone/>
@@ -18140,7 +18140,7 @@
                 <a:latin typeface="Calibri" pitchFamily="34" charset="0"/>
                 <a:cs typeface="Amiri" pitchFamily="2" charset="-78"/>
               </a:rPr>
-              <a:t>.</a:t>
+              <a:t>‏.</a:t>
             </a:r>
             <a:endParaRPr lang="en-US" sz="1150" dirty="0"/>
           </a:p>
@@ -20188,7 +20188,7 @@
                 <a:latin typeface="Calibri" pitchFamily="34" charset="0"/>
                 <a:cs typeface="Amiri" pitchFamily="2" charset="-78"/>
               </a:rPr>
-              <a:t>Write your podcast as a magazine article (about 50–70 words) in three paragraphs. Paragraph 1: your meals and favourite food, with a reason and a preference. Paragraph 2: a time you were ill — what you had, since when, what you did. Paragraph 3: two pieces of advice for a healthy life. Use at least five connectors, including </a:t>
+              <a:t>Write your podcast as a magazine article (about 50–70 words) in three paragraphs. Paragraph 1: your meals and favourite food, with a reason and a preference. Paragraph 2: a time you were ill — what you had, since when, what you did. Paragraph 3: two pieces of advice for a healthy life. Use at least five connectors, including ‏</a:t>
             </a:r>
             <a:pPr algn="l" indent="0" marL="0">
               <a:buNone/>
@@ -20215,7 +20215,7 @@
                 <a:latin typeface="Calibri" pitchFamily="34" charset="0"/>
                 <a:cs typeface="Amiri" pitchFamily="2" charset="-78"/>
               </a:rPr>
-              <a:t> and </a:t>
+              <a:t>‏ and ‏</a:t>
             </a:r>
             <a:pPr algn="l" indent="0" marL="0">
               <a:buNone/>
@@ -20242,7 +20242,7 @@
                 <a:latin typeface="Calibri" pitchFamily="34" charset="0"/>
                 <a:cs typeface="Amiri" pitchFamily="2" charset="-78"/>
               </a:rPr>
-              <a:t>.</a:t>
+              <a:t>‏.</a:t>
             </a:r>
             <a:endParaRPr lang="en-US" sz="1100" dirty="0"/>
           </a:p>
@@ -20394,7 +20394,7 @@
                 <a:latin typeface="Calibri" pitchFamily="34" charset="0"/>
                 <a:cs typeface="Amiri" pitchFamily="2" charset="-78"/>
               </a:rPr>
-              <a:t>☐  At least one </a:t>
+              <a:t>☐  At least one ‏</a:t>
             </a:r>
             <a:pPr algn="l" indent="0" marL="0">
               <a:buNone/>
@@ -20421,7 +20421,7 @@
                 <a:latin typeface="Calibri" pitchFamily="34" charset="0"/>
                 <a:cs typeface="Amiri" pitchFamily="2" charset="-78"/>
               </a:rPr>
-              <a:t> and one </a:t>
+              <a:t>‏ and one ‏</a:t>
             </a:r>
             <a:pPr algn="l" indent="0" marL="0">
               <a:buNone/>
@@ -20448,7 +20448,7 @@
                 <a:latin typeface="Calibri" pitchFamily="34" charset="0"/>
                 <a:cs typeface="Amiri" pitchFamily="2" charset="-78"/>
               </a:rPr>
-              <a:t> (Develop).</a:t>
+              <a:t>‏ (Develop).</a:t>
             </a:r>
             <a:endParaRPr lang="en-US" sz="1200" dirty="0"/>
           </a:p>
@@ -24155,7 +24155,7 @@
                 <a:latin typeface="Calibri" pitchFamily="34" charset="0"/>
                 <a:cs typeface="Amiri" pitchFamily="2" charset="-78"/>
               </a:rPr>
-              <a:t>use linking words (</a:t>
+              <a:t>use linking words (‏</a:t>
             </a:r>
             <a:pPr algn="l" indent="0" marL="0">
               <a:buNone/>
@@ -24263,7 +24263,7 @@
                 <a:latin typeface="Calibri" pitchFamily="34" charset="0"/>
                 <a:cs typeface="Amiri" pitchFamily="2" charset="-78"/>
               </a:rPr>
-              <a:t>)?</a:t>
+              <a:t>‏)?</a:t>
             </a:r>
             <a:endParaRPr lang="en-US" sz="1100" dirty="0"/>
           </a:p>
@@ -28249,7 +28249,7 @@
                 <a:latin typeface="Calibri" pitchFamily="34" charset="0"/>
                 <a:cs typeface="Amiri" pitchFamily="2" charset="-78"/>
               </a:rPr>
-              <a:t>I added reasons (</a:t>
+              <a:t>I added reasons (‏</a:t>
             </a:r>
             <a:pPr algn="l" indent="0" marL="0">
               <a:buNone/>
@@ -28276,7 +28276,7 @@
                 <a:latin typeface="Calibri" pitchFamily="34" charset="0"/>
                 <a:cs typeface="Amiri" pitchFamily="2" charset="-78"/>
               </a:rPr>
-              <a:t>) and extra details without frames.</a:t>
+              <a:t>‏) and extra details without frames.</a:t>
             </a:r>
             <a:endParaRPr lang="en-US" sz="1300" dirty="0"/>
           </a:p>
@@ -32404,7 +32404,7 @@
                 <a:latin typeface="Calibri" pitchFamily="34" charset="0"/>
                 <a:cs typeface="Amiri" pitchFamily="2" charset="-78"/>
               </a:rPr>
-              <a:t>☐  Add a reason (</a:t>
+              <a:t>☐  Add a reason (‏</a:t>
             </a:r>
             <a:pPr algn="l" indent="0" marL="0">
               <a:buNone/>
@@ -32431,7 +32431,7 @@
                 <a:latin typeface="Calibri" pitchFamily="34" charset="0"/>
                 <a:cs typeface="Amiri" pitchFamily="2" charset="-78"/>
               </a:rPr>
-              <a:t>) and an extra detail to every point.</a:t>
+              <a:t>‏) and an extra detail to every point.</a:t>
             </a:r>
             <a:endParaRPr lang="en-US" sz="1300" dirty="0"/>
           </a:p>
@@ -33952,7 +33952,7 @@
                 <a:latin typeface="Calibri" pitchFamily="34" charset="0"/>
                 <a:cs typeface="Amiri" pitchFamily="2" charset="-78"/>
               </a:rPr>
-              <a:t>Join a word from each lesson in one sentence with </a:t>
+              <a:t>Join a word from each lesson in one sentence with ‏</a:t>
             </a:r>
             <a:pPr algn="l" indent="0" marL="0">
               <a:buNone/>
@@ -33979,7 +33979,7 @@
                 <a:latin typeface="Calibri" pitchFamily="34" charset="0"/>
                 <a:cs typeface="Amiri" pitchFamily="2" charset="-78"/>
               </a:rPr>
-              <a:t> or </a:t>
+              <a:t>‏ or ‏</a:t>
             </a:r>
             <a:pPr algn="l" indent="0" marL="0">
               <a:buNone/>
@@ -34006,7 +34006,7 @@
                 <a:latin typeface="Calibri" pitchFamily="34" charset="0"/>
                 <a:cs typeface="Amiri" pitchFamily="2" charset="-78"/>
               </a:rPr>
-              <a:t>.</a:t>
+              <a:t>‏.</a:t>
             </a:r>
             <a:endParaRPr lang="en-US" sz="1150" dirty="0"/>
           </a:p>
